--- a/in_class_slides/geog4300_L04-readingdata.pptx
+++ b/in_class_slides/geog4300_L04-readingdata.pptx
@@ -5,7 +5,7 @@
     <p:sldMasterId id="2147483732" r:id="rId1"/>
   </p:sldMasterIdLst>
   <p:notesMasterIdLst>
-    <p:notesMasterId r:id="rId16"/>
+    <p:notesMasterId r:id="rId15"/>
   </p:notesMasterIdLst>
   <p:sldIdLst>
     <p:sldId id="256" r:id="rId2"/>
@@ -14,14 +14,13 @@
     <p:sldId id="275" r:id="rId5"/>
     <p:sldId id="276" r:id="rId6"/>
     <p:sldId id="272" r:id="rId7"/>
-    <p:sldId id="273" r:id="rId8"/>
-    <p:sldId id="280" r:id="rId9"/>
-    <p:sldId id="281" r:id="rId10"/>
-    <p:sldId id="270" r:id="rId11"/>
-    <p:sldId id="271" r:id="rId12"/>
-    <p:sldId id="277" r:id="rId13"/>
-    <p:sldId id="278" r:id="rId14"/>
-    <p:sldId id="279" r:id="rId15"/>
+    <p:sldId id="280" r:id="rId8"/>
+    <p:sldId id="281" r:id="rId9"/>
+    <p:sldId id="270" r:id="rId10"/>
+    <p:sldId id="271" r:id="rId11"/>
+    <p:sldId id="277" r:id="rId12"/>
+    <p:sldId id="278" r:id="rId13"/>
+    <p:sldId id="279" r:id="rId14"/>
   </p:sldIdLst>
   <p:sldSz cx="12192000" cy="6858000"/>
   <p:notesSz cx="6858000" cy="9144000"/>
@@ -1659,7 +1658,7 @@
           <a:p>
             <a:fld id="{1EB84F3F-161C-D647-9920-F983A7A8B541}" type="slidenum">
               <a:rPr lang="en-US" smtClean="0"/>
-              <a:t>10</a:t>
+              <a:t>9</a:t>
             </a:fld>
             <a:endParaRPr lang="en-US"/>
           </a:p>
@@ -5761,275 +5760,6 @@
   <p:cSld>
     <p:spTree>
       <p:nvGrpSpPr>
-        <p:cNvPr id="1" name="">
-          <a:extLst>
-            <a:ext uri="{FF2B5EF4-FFF2-40B4-BE49-F238E27FC236}">
-              <a16:creationId xmlns:a16="http://schemas.microsoft.com/office/drawing/2014/main" id="{567F2124-7DBC-AD03-50A6-D3AC0171D610}"/>
-            </a:ext>
-          </a:extLst>
-        </p:cNvPr>
-        <p:cNvGrpSpPr/>
-        <p:nvPr/>
-      </p:nvGrpSpPr>
-      <p:grpSpPr>
-        <a:xfrm>
-          <a:off x="0" y="0"/>
-          <a:ext cx="0" cy="0"/>
-          <a:chOff x="0" y="0"/>
-          <a:chExt cx="0" cy="0"/>
-        </a:xfrm>
-      </p:grpSpPr>
-      <p:sp>
-        <p:nvSpPr>
-          <p:cNvPr id="2" name="Title 1">
-            <a:extLst>
-              <a:ext uri="{FF2B5EF4-FFF2-40B4-BE49-F238E27FC236}">
-                <a16:creationId xmlns:a16="http://schemas.microsoft.com/office/drawing/2014/main" id="{45094D35-71A6-19A5-3C88-276C261693B9}"/>
-              </a:ext>
-            </a:extLst>
-          </p:cNvPr>
-          <p:cNvSpPr>
-            <a:spLocks noGrp="1"/>
-          </p:cNvSpPr>
-          <p:nvPr>
-            <p:ph type="title"/>
-          </p:nvPr>
-        </p:nvSpPr>
-        <p:spPr/>
-        <p:txBody>
-          <a:bodyPr/>
-          <a:lstStyle/>
-          <a:p>
-            <a:r>
-              <a:rPr lang="en-US" dirty="0"/>
-              <a:t>What is an “API”?</a:t>
-            </a:r>
-          </a:p>
-        </p:txBody>
-      </p:sp>
-      <p:sp>
-        <p:nvSpPr>
-          <p:cNvPr id="7" name="TextBox 6">
-            <a:extLst>
-              <a:ext uri="{FF2B5EF4-FFF2-40B4-BE49-F238E27FC236}">
-                <a16:creationId xmlns:a16="http://schemas.microsoft.com/office/drawing/2014/main" id="{2A4B8C7C-A8CD-E881-068E-D5835A4BE4E8}"/>
-              </a:ext>
-            </a:extLst>
-          </p:cNvPr>
-          <p:cNvSpPr txBox="1"/>
-          <p:nvPr/>
-        </p:nvSpPr>
-        <p:spPr>
-          <a:xfrm>
-            <a:off x="6206864" y="1265595"/>
-            <a:ext cx="4732871" cy="369332"/>
-          </a:xfrm>
-          <a:prstGeom prst="rect">
-            <a:avLst/>
-          </a:prstGeom>
-          <a:noFill/>
-        </p:spPr>
-        <p:txBody>
-          <a:bodyPr wrap="square" rtlCol="0">
-            <a:spAutoFit/>
-          </a:bodyPr>
-          <a:lstStyle/>
-          <a:p>
-            <a:r>
-              <a:rPr lang="en-US" b="1" dirty="0">
-                <a:solidFill>
-                  <a:schemeClr val="bg2">
-                    <a:lumMod val="50000"/>
-                  </a:schemeClr>
-                </a:solidFill>
-              </a:rPr>
-              <a:t>Application programming interface</a:t>
-            </a:r>
-          </a:p>
-        </p:txBody>
-      </p:sp>
-      <p:pic>
-        <p:nvPicPr>
-          <p:cNvPr id="1026" name="Picture 2" descr="What-is-an-API">
-            <a:extLst>
-              <a:ext uri="{FF2B5EF4-FFF2-40B4-BE49-F238E27FC236}">
-                <a16:creationId xmlns:a16="http://schemas.microsoft.com/office/drawing/2014/main" id="{85ED8693-1837-4A89-A24C-ECF7028CABA5}"/>
-              </a:ext>
-            </a:extLst>
-          </p:cNvPr>
-          <p:cNvPicPr>
-            <a:picLocks noChangeAspect="1" noChangeArrowheads="1"/>
-          </p:cNvPicPr>
-          <p:nvPr/>
-        </p:nvPicPr>
-        <p:blipFill>
-          <a:blip r:embed="rId3">
-            <a:extLst>
-              <a:ext uri="{28A0092B-C50C-407E-A947-70E740481C1C}">
-                <a14:useLocalDpi xmlns:a14="http://schemas.microsoft.com/office/drawing/2010/main" val="0"/>
-              </a:ext>
-            </a:extLst>
-          </a:blip>
-          <a:srcRect/>
-          <a:stretch>
-            <a:fillRect/>
-          </a:stretch>
-        </p:blipFill>
-        <p:spPr bwMode="auto">
-          <a:xfrm>
-            <a:off x="1181100" y="1901825"/>
-            <a:ext cx="9525000" cy="4476750"/>
-          </a:xfrm>
-          <a:prstGeom prst="rect">
-            <a:avLst/>
-          </a:prstGeom>
-          <a:noFill/>
-          <a:extLst>
-            <a:ext uri="{909E8E84-426E-40DD-AFC4-6F175D3DCCD1}">
-              <a14:hiddenFill xmlns:a14="http://schemas.microsoft.com/office/drawing/2010/main">
-                <a:solidFill>
-                  <a:srgbClr val="FFFFFF"/>
-                </a:solidFill>
-              </a14:hiddenFill>
-            </a:ext>
-          </a:extLst>
-        </p:spPr>
-      </p:pic>
-      <p:sp>
-        <p:nvSpPr>
-          <p:cNvPr id="8" name="TextBox 7">
-            <a:extLst>
-              <a:ext uri="{FF2B5EF4-FFF2-40B4-BE49-F238E27FC236}">
-                <a16:creationId xmlns:a16="http://schemas.microsoft.com/office/drawing/2014/main" id="{82549FDB-D93F-409D-A225-3667F7B4D971}"/>
-              </a:ext>
-            </a:extLst>
-          </p:cNvPr>
-          <p:cNvSpPr txBox="1"/>
-          <p:nvPr/>
-        </p:nvSpPr>
-        <p:spPr>
-          <a:xfrm>
-            <a:off x="416560" y="6417508"/>
-            <a:ext cx="7193280" cy="307777"/>
-          </a:xfrm>
-          <a:prstGeom prst="rect">
-            <a:avLst/>
-          </a:prstGeom>
-          <a:noFill/>
-        </p:spPr>
-        <p:txBody>
-          <a:bodyPr wrap="square">
-            <a:spAutoFit/>
-          </a:bodyPr>
-          <a:lstStyle/>
-          <a:p>
-            <a:r>
-              <a:rPr lang="en-US" sz="1400" dirty="0">
-                <a:solidFill>
-                  <a:schemeClr val="bg1"/>
-                </a:solidFill>
-              </a:rPr>
-              <a:t>https://www.geeksforgeeks.org/web-tech/terminologies-of-web-development/</a:t>
-            </a:r>
-          </a:p>
-        </p:txBody>
-      </p:sp>
-    </p:spTree>
-    <p:extLst>
-      <p:ext uri="{BB962C8B-B14F-4D97-AF65-F5344CB8AC3E}">
-        <p14:creationId xmlns:p14="http://schemas.microsoft.com/office/powerpoint/2010/main" val="1135782706"/>
-      </p:ext>
-    </p:extLst>
-  </p:cSld>
-  <p:clrMapOvr>
-    <a:masterClrMapping/>
-  </p:clrMapOvr>
-  <p:timing>
-    <p:tnLst>
-      <p:par>
-        <p:cTn id="1" dur="indefinite" restart="never" nodeType="tmRoot">
-          <p:childTnLst>
-            <p:seq concurrent="1" nextAc="seek">
-              <p:cTn id="2" dur="indefinite" nodeType="mainSeq">
-                <p:childTnLst>
-                  <p:par>
-                    <p:cTn id="3" fill="hold">
-                      <p:stCondLst>
-                        <p:cond delay="indefinite"/>
-                      </p:stCondLst>
-                      <p:childTnLst>
-                        <p:par>
-                          <p:cTn id="4" fill="hold">
-                            <p:stCondLst>
-                              <p:cond delay="0"/>
-                            </p:stCondLst>
-                            <p:childTnLst>
-                              <p:par>
-                                <p:cTn id="5" presetID="1" presetClass="entr" presetSubtype="0" fill="hold" grpId="0" nodeType="clickEffect">
-                                  <p:stCondLst>
-                                    <p:cond delay="0"/>
-                                  </p:stCondLst>
-                                  <p:childTnLst>
-                                    <p:set>
-                                      <p:cBhvr>
-                                        <p:cTn id="6" dur="1" fill="hold">
-                                          <p:stCondLst>
-                                            <p:cond delay="0"/>
-                                          </p:stCondLst>
-                                        </p:cTn>
-                                        <p:tgtEl>
-                                          <p:spTgt spid="7"/>
-                                        </p:tgtEl>
-                                        <p:attrNameLst>
-                                          <p:attrName>style.visibility</p:attrName>
-                                        </p:attrNameLst>
-                                      </p:cBhvr>
-                                      <p:to>
-                                        <p:strVal val="visible"/>
-                                      </p:to>
-                                    </p:set>
-                                  </p:childTnLst>
-                                </p:cTn>
-                              </p:par>
-                            </p:childTnLst>
-                          </p:cTn>
-                        </p:par>
-                      </p:childTnLst>
-                    </p:cTn>
-                  </p:par>
-                </p:childTnLst>
-              </p:cTn>
-              <p:prevCondLst>
-                <p:cond evt="onPrev" delay="0">
-                  <p:tgtEl>
-                    <p:sldTgt/>
-                  </p:tgtEl>
-                </p:cond>
-              </p:prevCondLst>
-              <p:nextCondLst>
-                <p:cond evt="onNext" delay="0">
-                  <p:tgtEl>
-                    <p:sldTgt/>
-                  </p:tgtEl>
-                </p:cond>
-              </p:nextCondLst>
-            </p:seq>
-          </p:childTnLst>
-        </p:cTn>
-      </p:par>
-    </p:tnLst>
-    <p:bldLst>
-      <p:bldP spid="7" grpId="0"/>
-    </p:bldLst>
-  </p:timing>
-</p:sld>
-</file>
-
-<file path=ppt/slides/slide11.xml><?xml version="1.0" encoding="utf-8"?>
-<p:sld xmlns:a="http://schemas.openxmlformats.org/drawingml/2006/main" xmlns:r="http://schemas.openxmlformats.org/officeDocument/2006/relationships" xmlns:p="http://schemas.openxmlformats.org/presentationml/2006/main">
-  <p:cSld>
-    <p:spTree>
-      <p:nvGrpSpPr>
         <p:cNvPr id="1" name=""/>
         <p:cNvGrpSpPr/>
         <p:nvPr/>
@@ -6199,7 +5929,7 @@
 </p:sld>
 </file>
 
-<file path=ppt/slides/slide12.xml><?xml version="1.0" encoding="utf-8"?>
+<file path=ppt/slides/slide11.xml><?xml version="1.0" encoding="utf-8"?>
 <p:sld xmlns:a="http://schemas.openxmlformats.org/drawingml/2006/main" xmlns:r="http://schemas.openxmlformats.org/officeDocument/2006/relationships" xmlns:p="http://schemas.openxmlformats.org/presentationml/2006/main">
   <p:cSld>
     <p:spTree>
@@ -6671,7 +6401,7 @@
 </p:sld>
 </file>
 
-<file path=ppt/slides/slide13.xml><?xml version="1.0" encoding="utf-8"?>
+<file path=ppt/slides/slide12.xml><?xml version="1.0" encoding="utf-8"?>
 <p:sld xmlns:a="http://schemas.openxmlformats.org/drawingml/2006/main" xmlns:r="http://schemas.openxmlformats.org/officeDocument/2006/relationships" xmlns:p="http://schemas.openxmlformats.org/presentationml/2006/main">
   <p:cSld>
     <p:spTree>
@@ -7213,7 +6943,7 @@
 </p:sld>
 </file>
 
-<file path=ppt/slides/slide14.xml><?xml version="1.0" encoding="utf-8"?>
+<file path=ppt/slides/slide13.xml><?xml version="1.0" encoding="utf-8"?>
 <p:sld xmlns:a="http://schemas.openxmlformats.org/drawingml/2006/main" xmlns:r="http://schemas.openxmlformats.org/officeDocument/2006/relationships" xmlns:p="http://schemas.openxmlformats.org/presentationml/2006/main">
   <p:cSld>
     <p:spTree>
@@ -10607,7 +10337,23 @@
                   <a:schemeClr val="bg1"/>
                 </a:solidFill>
               </a:rPr>
-              <a:t>Use `read.csv` to load this data into R. </a:t>
+              <a:t>Use `</a:t>
+            </a:r>
+            <a:r>
+              <a:rPr lang="en-US" sz="2000" dirty="0" err="1">
+                <a:solidFill>
+                  <a:schemeClr val="bg1"/>
+                </a:solidFill>
+              </a:rPr>
+              <a:t>read_csv</a:t>
+            </a:r>
+            <a:r>
+              <a:rPr lang="en-US" sz="2000" dirty="0">
+                <a:solidFill>
+                  <a:schemeClr val="bg1"/>
+                </a:solidFill>
+              </a:rPr>
+              <a:t>` to load this data into R. </a:t>
             </a:r>
           </a:p>
           <a:p>
@@ -10693,14 +10439,7 @@
           <a:p>
             <a:r>
               <a:rPr lang="en-US" dirty="0"/>
-              <a:t>Besides csv, </a:t>
-            </a:r>
-            <a:br>
-              <a:rPr lang="en-US" dirty="0"/>
-            </a:br>
-            <a:r>
-              <a:rPr lang="en-US" dirty="0"/>
-              <a:t>how many file types can you name?</a:t>
+              <a:t>What other file types do you see in our data?</a:t>
             </a:r>
           </a:p>
         </p:txBody>
@@ -10832,77 +10571,6 @@
       </p:grpSpPr>
       <p:sp>
         <p:nvSpPr>
-          <p:cNvPr id="2" name="Title 1">
-            <a:extLst>
-              <a:ext uri="{FF2B5EF4-FFF2-40B4-BE49-F238E27FC236}">
-                <a16:creationId xmlns:a16="http://schemas.microsoft.com/office/drawing/2014/main" id="{45CABAF7-6D45-4663-AD5F-41C4461AD126}"/>
-              </a:ext>
-            </a:extLst>
-          </p:cNvPr>
-          <p:cNvSpPr>
-            <a:spLocks noGrp="1"/>
-          </p:cNvSpPr>
-          <p:nvPr>
-            <p:ph type="title"/>
-          </p:nvPr>
-        </p:nvSpPr>
-        <p:spPr/>
-        <p:txBody>
-          <a:bodyPr/>
-          <a:lstStyle/>
-          <a:p>
-            <a:r>
-              <a:rPr lang="en-US" dirty="0"/>
-              <a:t>How many file types can you name?</a:t>
-            </a:r>
-          </a:p>
-        </p:txBody>
-      </p:sp>
-      <p:sp>
-        <p:nvSpPr>
-          <p:cNvPr id="3" name="Content Placeholder 2">
-            <a:extLst>
-              <a:ext uri="{FF2B5EF4-FFF2-40B4-BE49-F238E27FC236}">
-                <a16:creationId xmlns:a16="http://schemas.microsoft.com/office/drawing/2014/main" id="{097CFF49-6B41-4AE0-A375-7006BBA9A130}"/>
-              </a:ext>
-            </a:extLst>
-          </p:cNvPr>
-          <p:cNvSpPr>
-            <a:spLocks noGrp="1"/>
-          </p:cNvSpPr>
-          <p:nvPr>
-            <p:ph idx="1"/>
-          </p:nvPr>
-        </p:nvSpPr>
-        <p:spPr/>
-        <p:txBody>
-          <a:bodyPr/>
-          <a:lstStyle/>
-          <a:p>
-            <a:r>
-              <a:rPr lang="en-US" dirty="0"/>
-              <a:t>Full name of the file type</a:t>
-            </a:r>
-          </a:p>
-          <a:p>
-            <a:r>
-              <a:rPr lang="en-US" dirty="0"/>
-              <a:t>Its extension (e.g., “.csv”)</a:t>
-            </a:r>
-          </a:p>
-          <a:p>
-            <a:r>
-              <a:rPr lang="en-US" dirty="0"/>
-              <a:t>What it’s used for</a:t>
-            </a:r>
-          </a:p>
-          <a:p>
-            <a:endParaRPr lang="en-US" dirty="0"/>
-          </a:p>
-        </p:txBody>
-      </p:sp>
-      <p:sp>
-        <p:nvSpPr>
           <p:cNvPr id="4" name="Slide Number Placeholder 3">
             <a:extLst>
               <a:ext uri="{FF2B5EF4-FFF2-40B4-BE49-F238E27FC236}">
@@ -10936,81 +10604,6 @@
                 <a:buSzPct val="25000"/>
               </a:pPr>
               <a:t>7</a:t>
-            </a:fld>
-            <a:endParaRPr lang="en-US" sz="1200" dirty="0">
-              <a:latin typeface="Calibri"/>
-              <a:ea typeface="Calibri"/>
-              <a:cs typeface="Calibri"/>
-              <a:sym typeface="Calibri"/>
-            </a:endParaRPr>
-          </a:p>
-        </p:txBody>
-      </p:sp>
-    </p:spTree>
-    <p:extLst>
-      <p:ext uri="{BB962C8B-B14F-4D97-AF65-F5344CB8AC3E}">
-        <p14:creationId xmlns:p14="http://schemas.microsoft.com/office/powerpoint/2010/main" val="3801913343"/>
-      </p:ext>
-    </p:extLst>
-  </p:cSld>
-  <p:clrMapOvr>
-    <a:masterClrMapping/>
-  </p:clrMapOvr>
-</p:sld>
-</file>
-
-<file path=ppt/slides/slide8.xml><?xml version="1.0" encoding="utf-8"?>
-<p:sld xmlns:a="http://schemas.openxmlformats.org/drawingml/2006/main" xmlns:r="http://schemas.openxmlformats.org/officeDocument/2006/relationships" xmlns:p="http://schemas.openxmlformats.org/presentationml/2006/main">
-  <p:cSld>
-    <p:spTree>
-      <p:nvGrpSpPr>
-        <p:cNvPr id="1" name=""/>
-        <p:cNvGrpSpPr/>
-        <p:nvPr/>
-      </p:nvGrpSpPr>
-      <p:grpSpPr>
-        <a:xfrm>
-          <a:off x="0" y="0"/>
-          <a:ext cx="0" cy="0"/>
-          <a:chOff x="0" y="0"/>
-          <a:chExt cx="0" cy="0"/>
-        </a:xfrm>
-      </p:grpSpPr>
-      <p:sp>
-        <p:nvSpPr>
-          <p:cNvPr id="4" name="Slide Number Placeholder 3">
-            <a:extLst>
-              <a:ext uri="{FF2B5EF4-FFF2-40B4-BE49-F238E27FC236}">
-                <a16:creationId xmlns:a16="http://schemas.microsoft.com/office/drawing/2014/main" id="{87A95856-95F6-4516-A21E-BF7FF5FE8293}"/>
-              </a:ext>
-            </a:extLst>
-          </p:cNvPr>
-          <p:cNvSpPr>
-            <a:spLocks noGrp="1"/>
-          </p:cNvSpPr>
-          <p:nvPr>
-            <p:ph type="sldNum" sz="quarter" idx="12"/>
-          </p:nvPr>
-        </p:nvSpPr>
-        <p:spPr/>
-        <p:txBody>
-          <a:bodyPr/>
-          <a:lstStyle/>
-          <a:p>
-            <a:pPr>
-              <a:buSzPct val="25000"/>
-            </a:pPr>
-            <a:fld id="{00000000-1234-1234-1234-123412341234}" type="slidenum">
-              <a:rPr lang="en-US" sz="1200" smtClean="0">
-                <a:latin typeface="Calibri"/>
-                <a:ea typeface="Calibri"/>
-                <a:cs typeface="Calibri"/>
-                <a:sym typeface="Calibri"/>
-              </a:rPr>
-              <a:pPr>
-                <a:buSzPct val="25000"/>
-              </a:pPr>
-              <a:t>8</a:t>
             </a:fld>
             <a:endParaRPr lang="en-US" sz="1200" dirty="0">
               <a:latin typeface="Calibri"/>
@@ -11115,7 +10708,7 @@
 </p:sld>
 </file>
 
-<file path=ppt/slides/slide9.xml><?xml version="1.0" encoding="utf-8"?>
+<file path=ppt/slides/slide8.xml><?xml version="1.0" encoding="utf-8"?>
 <p:sld xmlns:a="http://schemas.openxmlformats.org/drawingml/2006/main" xmlns:r="http://schemas.openxmlformats.org/officeDocument/2006/relationships" xmlns:p="http://schemas.openxmlformats.org/presentationml/2006/main">
   <p:cSld>
     <p:spTree>
@@ -11275,7 +10868,7 @@
               <a:pPr>
                 <a:buSzPct val="25000"/>
               </a:pPr>
-              <a:t>9</a:t>
+              <a:t>8</a:t>
             </a:fld>
             <a:endParaRPr lang="en-US" sz="1200" dirty="0">
               <a:latin typeface="Calibri"/>
@@ -11397,6 +10990,275 @@
   <p:clrMapOvr>
     <a:masterClrMapping/>
   </p:clrMapOvr>
+</p:sld>
+</file>
+
+<file path=ppt/slides/slide9.xml><?xml version="1.0" encoding="utf-8"?>
+<p:sld xmlns:a="http://schemas.openxmlformats.org/drawingml/2006/main" xmlns:r="http://schemas.openxmlformats.org/officeDocument/2006/relationships" xmlns:p="http://schemas.openxmlformats.org/presentationml/2006/main">
+  <p:cSld>
+    <p:spTree>
+      <p:nvGrpSpPr>
+        <p:cNvPr id="1" name="">
+          <a:extLst>
+            <a:ext uri="{FF2B5EF4-FFF2-40B4-BE49-F238E27FC236}">
+              <a16:creationId xmlns:a16="http://schemas.microsoft.com/office/drawing/2014/main" id="{567F2124-7DBC-AD03-50A6-D3AC0171D610}"/>
+            </a:ext>
+          </a:extLst>
+        </p:cNvPr>
+        <p:cNvGrpSpPr/>
+        <p:nvPr/>
+      </p:nvGrpSpPr>
+      <p:grpSpPr>
+        <a:xfrm>
+          <a:off x="0" y="0"/>
+          <a:ext cx="0" cy="0"/>
+          <a:chOff x="0" y="0"/>
+          <a:chExt cx="0" cy="0"/>
+        </a:xfrm>
+      </p:grpSpPr>
+      <p:sp>
+        <p:nvSpPr>
+          <p:cNvPr id="2" name="Title 1">
+            <a:extLst>
+              <a:ext uri="{FF2B5EF4-FFF2-40B4-BE49-F238E27FC236}">
+                <a16:creationId xmlns:a16="http://schemas.microsoft.com/office/drawing/2014/main" id="{45094D35-71A6-19A5-3C88-276C261693B9}"/>
+              </a:ext>
+            </a:extLst>
+          </p:cNvPr>
+          <p:cNvSpPr>
+            <a:spLocks noGrp="1"/>
+          </p:cNvSpPr>
+          <p:nvPr>
+            <p:ph type="title"/>
+          </p:nvPr>
+        </p:nvSpPr>
+        <p:spPr/>
+        <p:txBody>
+          <a:bodyPr/>
+          <a:lstStyle/>
+          <a:p>
+            <a:r>
+              <a:rPr lang="en-US" dirty="0"/>
+              <a:t>What is an “API”?</a:t>
+            </a:r>
+          </a:p>
+        </p:txBody>
+      </p:sp>
+      <p:sp>
+        <p:nvSpPr>
+          <p:cNvPr id="7" name="TextBox 6">
+            <a:extLst>
+              <a:ext uri="{FF2B5EF4-FFF2-40B4-BE49-F238E27FC236}">
+                <a16:creationId xmlns:a16="http://schemas.microsoft.com/office/drawing/2014/main" id="{2A4B8C7C-A8CD-E881-068E-D5835A4BE4E8}"/>
+              </a:ext>
+            </a:extLst>
+          </p:cNvPr>
+          <p:cNvSpPr txBox="1"/>
+          <p:nvPr/>
+        </p:nvSpPr>
+        <p:spPr>
+          <a:xfrm>
+            <a:off x="6206864" y="1265595"/>
+            <a:ext cx="4732871" cy="369332"/>
+          </a:xfrm>
+          <a:prstGeom prst="rect">
+            <a:avLst/>
+          </a:prstGeom>
+          <a:noFill/>
+        </p:spPr>
+        <p:txBody>
+          <a:bodyPr wrap="square" rtlCol="0">
+            <a:spAutoFit/>
+          </a:bodyPr>
+          <a:lstStyle/>
+          <a:p>
+            <a:r>
+              <a:rPr lang="en-US" b="1" dirty="0">
+                <a:solidFill>
+                  <a:schemeClr val="bg2">
+                    <a:lumMod val="50000"/>
+                  </a:schemeClr>
+                </a:solidFill>
+              </a:rPr>
+              <a:t>Application programming interface</a:t>
+            </a:r>
+          </a:p>
+        </p:txBody>
+      </p:sp>
+      <p:pic>
+        <p:nvPicPr>
+          <p:cNvPr id="1026" name="Picture 2" descr="What-is-an-API">
+            <a:extLst>
+              <a:ext uri="{FF2B5EF4-FFF2-40B4-BE49-F238E27FC236}">
+                <a16:creationId xmlns:a16="http://schemas.microsoft.com/office/drawing/2014/main" id="{85ED8693-1837-4A89-A24C-ECF7028CABA5}"/>
+              </a:ext>
+            </a:extLst>
+          </p:cNvPr>
+          <p:cNvPicPr>
+            <a:picLocks noChangeAspect="1" noChangeArrowheads="1"/>
+          </p:cNvPicPr>
+          <p:nvPr/>
+        </p:nvPicPr>
+        <p:blipFill>
+          <a:blip r:embed="rId3">
+            <a:extLst>
+              <a:ext uri="{28A0092B-C50C-407E-A947-70E740481C1C}">
+                <a14:useLocalDpi xmlns:a14="http://schemas.microsoft.com/office/drawing/2010/main" val="0"/>
+              </a:ext>
+            </a:extLst>
+          </a:blip>
+          <a:srcRect/>
+          <a:stretch>
+            <a:fillRect/>
+          </a:stretch>
+        </p:blipFill>
+        <p:spPr bwMode="auto">
+          <a:xfrm>
+            <a:off x="1181100" y="1901825"/>
+            <a:ext cx="9525000" cy="4476750"/>
+          </a:xfrm>
+          <a:prstGeom prst="rect">
+            <a:avLst/>
+          </a:prstGeom>
+          <a:noFill/>
+          <a:extLst>
+            <a:ext uri="{909E8E84-426E-40DD-AFC4-6F175D3DCCD1}">
+              <a14:hiddenFill xmlns:a14="http://schemas.microsoft.com/office/drawing/2010/main">
+                <a:solidFill>
+                  <a:srgbClr val="FFFFFF"/>
+                </a:solidFill>
+              </a14:hiddenFill>
+            </a:ext>
+          </a:extLst>
+        </p:spPr>
+      </p:pic>
+      <p:sp>
+        <p:nvSpPr>
+          <p:cNvPr id="8" name="TextBox 7">
+            <a:extLst>
+              <a:ext uri="{FF2B5EF4-FFF2-40B4-BE49-F238E27FC236}">
+                <a16:creationId xmlns:a16="http://schemas.microsoft.com/office/drawing/2014/main" id="{82549FDB-D93F-409D-A225-3667F7B4D971}"/>
+              </a:ext>
+            </a:extLst>
+          </p:cNvPr>
+          <p:cNvSpPr txBox="1"/>
+          <p:nvPr/>
+        </p:nvSpPr>
+        <p:spPr>
+          <a:xfrm>
+            <a:off x="416560" y="6417508"/>
+            <a:ext cx="7193280" cy="307777"/>
+          </a:xfrm>
+          <a:prstGeom prst="rect">
+            <a:avLst/>
+          </a:prstGeom>
+          <a:noFill/>
+        </p:spPr>
+        <p:txBody>
+          <a:bodyPr wrap="square">
+            <a:spAutoFit/>
+          </a:bodyPr>
+          <a:lstStyle/>
+          <a:p>
+            <a:r>
+              <a:rPr lang="en-US" sz="1400" dirty="0">
+                <a:solidFill>
+                  <a:schemeClr val="bg1"/>
+                </a:solidFill>
+              </a:rPr>
+              <a:t>https://www.geeksforgeeks.org/web-tech/terminologies-of-web-development/</a:t>
+            </a:r>
+          </a:p>
+        </p:txBody>
+      </p:sp>
+    </p:spTree>
+    <p:extLst>
+      <p:ext uri="{BB962C8B-B14F-4D97-AF65-F5344CB8AC3E}">
+        <p14:creationId xmlns:p14="http://schemas.microsoft.com/office/powerpoint/2010/main" val="1135782706"/>
+      </p:ext>
+    </p:extLst>
+  </p:cSld>
+  <p:clrMapOvr>
+    <a:masterClrMapping/>
+  </p:clrMapOvr>
+  <p:timing>
+    <p:tnLst>
+      <p:par>
+        <p:cTn id="1" dur="indefinite" restart="never" nodeType="tmRoot">
+          <p:childTnLst>
+            <p:seq concurrent="1" nextAc="seek">
+              <p:cTn id="2" dur="indefinite" nodeType="mainSeq">
+                <p:childTnLst>
+                  <p:par>
+                    <p:cTn id="3" fill="hold">
+                      <p:stCondLst>
+                        <p:cond delay="indefinite"/>
+                      </p:stCondLst>
+                      <p:childTnLst>
+                        <p:par>
+                          <p:cTn id="4" fill="hold">
+                            <p:stCondLst>
+                              <p:cond delay="0"/>
+                            </p:stCondLst>
+                            <p:childTnLst>
+                              <p:par>
+                                <p:cTn id="5" presetID="1" presetClass="entr" presetSubtype="0" fill="hold" grpId="0" nodeType="clickEffect">
+                                  <p:stCondLst>
+                                    <p:cond delay="0"/>
+                                  </p:stCondLst>
+                                  <p:childTnLst>
+                                    <p:set>
+                                      <p:cBhvr>
+                                        <p:cTn id="6" dur="1" fill="hold">
+                                          <p:stCondLst>
+                                            <p:cond delay="0"/>
+                                          </p:stCondLst>
+                                        </p:cTn>
+                                        <p:tgtEl>
+                                          <p:spTgt spid="7"/>
+                                        </p:tgtEl>
+                                        <p:attrNameLst>
+                                          <p:attrName>style.visibility</p:attrName>
+                                        </p:attrNameLst>
+                                      </p:cBhvr>
+                                      <p:to>
+                                        <p:strVal val="visible"/>
+                                      </p:to>
+                                    </p:set>
+                                  </p:childTnLst>
+                                </p:cTn>
+                              </p:par>
+                            </p:childTnLst>
+                          </p:cTn>
+                        </p:par>
+                      </p:childTnLst>
+                    </p:cTn>
+                  </p:par>
+                </p:childTnLst>
+              </p:cTn>
+              <p:prevCondLst>
+                <p:cond evt="onPrev" delay="0">
+                  <p:tgtEl>
+                    <p:sldTgt/>
+                  </p:tgtEl>
+                </p:cond>
+              </p:prevCondLst>
+              <p:nextCondLst>
+                <p:cond evt="onNext" delay="0">
+                  <p:tgtEl>
+                    <p:sldTgt/>
+                  </p:tgtEl>
+                </p:cond>
+              </p:nextCondLst>
+            </p:seq>
+          </p:childTnLst>
+        </p:cTn>
+      </p:par>
+    </p:tnLst>
+    <p:bldLst>
+      <p:bldP spid="7" grpId="0"/>
+    </p:bldLst>
+  </p:timing>
 </p:sld>
 </file>
 

--- a/in_class_slides/geog4300_L04-readingdata.pptx
+++ b/in_class_slides/geog4300_L04-readingdata.pptx
@@ -5,7 +5,7 @@
     <p:sldMasterId id="2147483732" r:id="rId1"/>
   </p:sldMasterIdLst>
   <p:notesMasterIdLst>
-    <p:notesMasterId r:id="rId15"/>
+    <p:notesMasterId r:id="rId16"/>
   </p:notesMasterIdLst>
   <p:sldIdLst>
     <p:sldId id="256" r:id="rId2"/>
@@ -14,13 +14,14 @@
     <p:sldId id="275" r:id="rId5"/>
     <p:sldId id="276" r:id="rId6"/>
     <p:sldId id="272" r:id="rId7"/>
-    <p:sldId id="280" r:id="rId8"/>
-    <p:sldId id="281" r:id="rId9"/>
-    <p:sldId id="270" r:id="rId10"/>
-    <p:sldId id="271" r:id="rId11"/>
-    <p:sldId id="277" r:id="rId12"/>
-    <p:sldId id="278" r:id="rId13"/>
-    <p:sldId id="279" r:id="rId14"/>
+    <p:sldId id="273" r:id="rId8"/>
+    <p:sldId id="280" r:id="rId9"/>
+    <p:sldId id="281" r:id="rId10"/>
+    <p:sldId id="270" r:id="rId11"/>
+    <p:sldId id="271" r:id="rId12"/>
+    <p:sldId id="277" r:id="rId13"/>
+    <p:sldId id="278" r:id="rId14"/>
+    <p:sldId id="279" r:id="rId15"/>
   </p:sldIdLst>
   <p:sldSz cx="12192000" cy="6858000"/>
   <p:notesSz cx="6858000" cy="9144000"/>
@@ -1658,7 +1659,7 @@
           <a:p>
             <a:fld id="{1EB84F3F-161C-D647-9920-F983A7A8B541}" type="slidenum">
               <a:rPr lang="en-US" smtClean="0"/>
-              <a:t>9</a:t>
+              <a:t>10</a:t>
             </a:fld>
             <a:endParaRPr lang="en-US"/>
           </a:p>
@@ -5760,6 +5761,275 @@
   <p:cSld>
     <p:spTree>
       <p:nvGrpSpPr>
+        <p:cNvPr id="1" name="">
+          <a:extLst>
+            <a:ext uri="{FF2B5EF4-FFF2-40B4-BE49-F238E27FC236}">
+              <a16:creationId xmlns:a16="http://schemas.microsoft.com/office/drawing/2014/main" id="{567F2124-7DBC-AD03-50A6-D3AC0171D610}"/>
+            </a:ext>
+          </a:extLst>
+        </p:cNvPr>
+        <p:cNvGrpSpPr/>
+        <p:nvPr/>
+      </p:nvGrpSpPr>
+      <p:grpSpPr>
+        <a:xfrm>
+          <a:off x="0" y="0"/>
+          <a:ext cx="0" cy="0"/>
+          <a:chOff x="0" y="0"/>
+          <a:chExt cx="0" cy="0"/>
+        </a:xfrm>
+      </p:grpSpPr>
+      <p:sp>
+        <p:nvSpPr>
+          <p:cNvPr id="2" name="Title 1">
+            <a:extLst>
+              <a:ext uri="{FF2B5EF4-FFF2-40B4-BE49-F238E27FC236}">
+                <a16:creationId xmlns:a16="http://schemas.microsoft.com/office/drawing/2014/main" id="{45094D35-71A6-19A5-3C88-276C261693B9}"/>
+              </a:ext>
+            </a:extLst>
+          </p:cNvPr>
+          <p:cNvSpPr>
+            <a:spLocks noGrp="1"/>
+          </p:cNvSpPr>
+          <p:nvPr>
+            <p:ph type="title"/>
+          </p:nvPr>
+        </p:nvSpPr>
+        <p:spPr/>
+        <p:txBody>
+          <a:bodyPr/>
+          <a:lstStyle/>
+          <a:p>
+            <a:r>
+              <a:rPr lang="en-US" dirty="0"/>
+              <a:t>What is an “API”?</a:t>
+            </a:r>
+          </a:p>
+        </p:txBody>
+      </p:sp>
+      <p:sp>
+        <p:nvSpPr>
+          <p:cNvPr id="7" name="TextBox 6">
+            <a:extLst>
+              <a:ext uri="{FF2B5EF4-FFF2-40B4-BE49-F238E27FC236}">
+                <a16:creationId xmlns:a16="http://schemas.microsoft.com/office/drawing/2014/main" id="{2A4B8C7C-A8CD-E881-068E-D5835A4BE4E8}"/>
+              </a:ext>
+            </a:extLst>
+          </p:cNvPr>
+          <p:cNvSpPr txBox="1"/>
+          <p:nvPr/>
+        </p:nvSpPr>
+        <p:spPr>
+          <a:xfrm>
+            <a:off x="6206864" y="1265595"/>
+            <a:ext cx="4732871" cy="369332"/>
+          </a:xfrm>
+          <a:prstGeom prst="rect">
+            <a:avLst/>
+          </a:prstGeom>
+          <a:noFill/>
+        </p:spPr>
+        <p:txBody>
+          <a:bodyPr wrap="square" rtlCol="0">
+            <a:spAutoFit/>
+          </a:bodyPr>
+          <a:lstStyle/>
+          <a:p>
+            <a:r>
+              <a:rPr lang="en-US" b="1" dirty="0">
+                <a:solidFill>
+                  <a:schemeClr val="bg2">
+                    <a:lumMod val="50000"/>
+                  </a:schemeClr>
+                </a:solidFill>
+              </a:rPr>
+              <a:t>Application programming interface</a:t>
+            </a:r>
+          </a:p>
+        </p:txBody>
+      </p:sp>
+      <p:pic>
+        <p:nvPicPr>
+          <p:cNvPr id="1026" name="Picture 2" descr="What-is-an-API">
+            <a:extLst>
+              <a:ext uri="{FF2B5EF4-FFF2-40B4-BE49-F238E27FC236}">
+                <a16:creationId xmlns:a16="http://schemas.microsoft.com/office/drawing/2014/main" id="{85ED8693-1837-4A89-A24C-ECF7028CABA5}"/>
+              </a:ext>
+            </a:extLst>
+          </p:cNvPr>
+          <p:cNvPicPr>
+            <a:picLocks noChangeAspect="1" noChangeArrowheads="1"/>
+          </p:cNvPicPr>
+          <p:nvPr/>
+        </p:nvPicPr>
+        <p:blipFill>
+          <a:blip r:embed="rId3">
+            <a:extLst>
+              <a:ext uri="{28A0092B-C50C-407E-A947-70E740481C1C}">
+                <a14:useLocalDpi xmlns:a14="http://schemas.microsoft.com/office/drawing/2010/main" val="0"/>
+              </a:ext>
+            </a:extLst>
+          </a:blip>
+          <a:srcRect/>
+          <a:stretch>
+            <a:fillRect/>
+          </a:stretch>
+        </p:blipFill>
+        <p:spPr bwMode="auto">
+          <a:xfrm>
+            <a:off x="1181100" y="1901825"/>
+            <a:ext cx="9525000" cy="4476750"/>
+          </a:xfrm>
+          <a:prstGeom prst="rect">
+            <a:avLst/>
+          </a:prstGeom>
+          <a:noFill/>
+          <a:extLst>
+            <a:ext uri="{909E8E84-426E-40DD-AFC4-6F175D3DCCD1}">
+              <a14:hiddenFill xmlns:a14="http://schemas.microsoft.com/office/drawing/2010/main">
+                <a:solidFill>
+                  <a:srgbClr val="FFFFFF"/>
+                </a:solidFill>
+              </a14:hiddenFill>
+            </a:ext>
+          </a:extLst>
+        </p:spPr>
+      </p:pic>
+      <p:sp>
+        <p:nvSpPr>
+          <p:cNvPr id="8" name="TextBox 7">
+            <a:extLst>
+              <a:ext uri="{FF2B5EF4-FFF2-40B4-BE49-F238E27FC236}">
+                <a16:creationId xmlns:a16="http://schemas.microsoft.com/office/drawing/2014/main" id="{82549FDB-D93F-409D-A225-3667F7B4D971}"/>
+              </a:ext>
+            </a:extLst>
+          </p:cNvPr>
+          <p:cNvSpPr txBox="1"/>
+          <p:nvPr/>
+        </p:nvSpPr>
+        <p:spPr>
+          <a:xfrm>
+            <a:off x="416560" y="6417508"/>
+            <a:ext cx="7193280" cy="307777"/>
+          </a:xfrm>
+          <a:prstGeom prst="rect">
+            <a:avLst/>
+          </a:prstGeom>
+          <a:noFill/>
+        </p:spPr>
+        <p:txBody>
+          <a:bodyPr wrap="square">
+            <a:spAutoFit/>
+          </a:bodyPr>
+          <a:lstStyle/>
+          <a:p>
+            <a:r>
+              <a:rPr lang="en-US" sz="1400" dirty="0">
+                <a:solidFill>
+                  <a:schemeClr val="bg1"/>
+                </a:solidFill>
+              </a:rPr>
+              <a:t>https://www.geeksforgeeks.org/web-tech/terminologies-of-web-development/</a:t>
+            </a:r>
+          </a:p>
+        </p:txBody>
+      </p:sp>
+    </p:spTree>
+    <p:extLst>
+      <p:ext uri="{BB962C8B-B14F-4D97-AF65-F5344CB8AC3E}">
+        <p14:creationId xmlns:p14="http://schemas.microsoft.com/office/powerpoint/2010/main" val="1135782706"/>
+      </p:ext>
+    </p:extLst>
+  </p:cSld>
+  <p:clrMapOvr>
+    <a:masterClrMapping/>
+  </p:clrMapOvr>
+  <p:timing>
+    <p:tnLst>
+      <p:par>
+        <p:cTn id="1" dur="indefinite" restart="never" nodeType="tmRoot">
+          <p:childTnLst>
+            <p:seq concurrent="1" nextAc="seek">
+              <p:cTn id="2" dur="indefinite" nodeType="mainSeq">
+                <p:childTnLst>
+                  <p:par>
+                    <p:cTn id="3" fill="hold">
+                      <p:stCondLst>
+                        <p:cond delay="indefinite"/>
+                      </p:stCondLst>
+                      <p:childTnLst>
+                        <p:par>
+                          <p:cTn id="4" fill="hold">
+                            <p:stCondLst>
+                              <p:cond delay="0"/>
+                            </p:stCondLst>
+                            <p:childTnLst>
+                              <p:par>
+                                <p:cTn id="5" presetID="1" presetClass="entr" presetSubtype="0" fill="hold" grpId="0" nodeType="clickEffect">
+                                  <p:stCondLst>
+                                    <p:cond delay="0"/>
+                                  </p:stCondLst>
+                                  <p:childTnLst>
+                                    <p:set>
+                                      <p:cBhvr>
+                                        <p:cTn id="6" dur="1" fill="hold">
+                                          <p:stCondLst>
+                                            <p:cond delay="0"/>
+                                          </p:stCondLst>
+                                        </p:cTn>
+                                        <p:tgtEl>
+                                          <p:spTgt spid="7"/>
+                                        </p:tgtEl>
+                                        <p:attrNameLst>
+                                          <p:attrName>style.visibility</p:attrName>
+                                        </p:attrNameLst>
+                                      </p:cBhvr>
+                                      <p:to>
+                                        <p:strVal val="visible"/>
+                                      </p:to>
+                                    </p:set>
+                                  </p:childTnLst>
+                                </p:cTn>
+                              </p:par>
+                            </p:childTnLst>
+                          </p:cTn>
+                        </p:par>
+                      </p:childTnLst>
+                    </p:cTn>
+                  </p:par>
+                </p:childTnLst>
+              </p:cTn>
+              <p:prevCondLst>
+                <p:cond evt="onPrev" delay="0">
+                  <p:tgtEl>
+                    <p:sldTgt/>
+                  </p:tgtEl>
+                </p:cond>
+              </p:prevCondLst>
+              <p:nextCondLst>
+                <p:cond evt="onNext" delay="0">
+                  <p:tgtEl>
+                    <p:sldTgt/>
+                  </p:tgtEl>
+                </p:cond>
+              </p:nextCondLst>
+            </p:seq>
+          </p:childTnLst>
+        </p:cTn>
+      </p:par>
+    </p:tnLst>
+    <p:bldLst>
+      <p:bldP spid="7" grpId="0"/>
+    </p:bldLst>
+  </p:timing>
+</p:sld>
+</file>
+
+<file path=ppt/slides/slide11.xml><?xml version="1.0" encoding="utf-8"?>
+<p:sld xmlns:a="http://schemas.openxmlformats.org/drawingml/2006/main" xmlns:r="http://schemas.openxmlformats.org/officeDocument/2006/relationships" xmlns:p="http://schemas.openxmlformats.org/presentationml/2006/main">
+  <p:cSld>
+    <p:spTree>
+      <p:nvGrpSpPr>
         <p:cNvPr id="1" name=""/>
         <p:cNvGrpSpPr/>
         <p:nvPr/>
@@ -5929,7 +6199,7 @@
 </p:sld>
 </file>
 
-<file path=ppt/slides/slide11.xml><?xml version="1.0" encoding="utf-8"?>
+<file path=ppt/slides/slide12.xml><?xml version="1.0" encoding="utf-8"?>
 <p:sld xmlns:a="http://schemas.openxmlformats.org/drawingml/2006/main" xmlns:r="http://schemas.openxmlformats.org/officeDocument/2006/relationships" xmlns:p="http://schemas.openxmlformats.org/presentationml/2006/main">
   <p:cSld>
     <p:spTree>
@@ -6401,7 +6671,7 @@
 </p:sld>
 </file>
 
-<file path=ppt/slides/slide12.xml><?xml version="1.0" encoding="utf-8"?>
+<file path=ppt/slides/slide13.xml><?xml version="1.0" encoding="utf-8"?>
 <p:sld xmlns:a="http://schemas.openxmlformats.org/drawingml/2006/main" xmlns:r="http://schemas.openxmlformats.org/officeDocument/2006/relationships" xmlns:p="http://schemas.openxmlformats.org/presentationml/2006/main">
   <p:cSld>
     <p:spTree>
@@ -6930,6 +7200,380 @@
           </a:p>
         </p:txBody>
       </p:sp>
+      <p:sp>
+        <p:nvSpPr>
+          <p:cNvPr id="3" name="Rectangle 2">
+            <a:extLst>
+              <a:ext uri="{FF2B5EF4-FFF2-40B4-BE49-F238E27FC236}">
+                <a16:creationId xmlns:a16="http://schemas.microsoft.com/office/drawing/2014/main" id="{E550344F-286B-4F45-885E-15D3DD7A32A3}"/>
+              </a:ext>
+            </a:extLst>
+          </p:cNvPr>
+          <p:cNvSpPr>
+            <a:spLocks noChangeArrowheads="1"/>
+          </p:cNvSpPr>
+          <p:nvPr/>
+        </p:nvSpPr>
+        <p:spPr bwMode="auto">
+          <a:xfrm>
+            <a:off x="7669161" y="2413337"/>
+            <a:ext cx="3342582" cy="2031325"/>
+          </a:xfrm>
+          <a:prstGeom prst="rect">
+            <a:avLst/>
+          </a:prstGeom>
+          <a:noFill/>
+          <a:ln>
+            <a:noFill/>
+          </a:ln>
+          <a:effectLst/>
+          <a:extLst>
+            <a:ext uri="{909E8E84-426E-40DD-AFC4-6F175D3DCCD1}">
+              <a14:hiddenFill xmlns:a14="http://schemas.microsoft.com/office/drawing/2010/main">
+                <a:solidFill>
+                  <a:schemeClr val="accent1"/>
+                </a:solidFill>
+              </a14:hiddenFill>
+            </a:ext>
+            <a:ext uri="{91240B29-F687-4F45-9708-019B960494DF}">
+              <a14:hiddenLine xmlns:a14="http://schemas.microsoft.com/office/drawing/2010/main" w="9525">
+                <a:solidFill>
+                  <a:schemeClr val="tx1"/>
+                </a:solidFill>
+                <a:miter lim="800000"/>
+                <a:headEnd/>
+                <a:tailEnd/>
+              </a14:hiddenLine>
+            </a:ext>
+            <a:ext uri="{AF507438-7753-43E0-B8FC-AC1667EBCBE1}">
+              <a14:hiddenEffects xmlns:a14="http://schemas.microsoft.com/office/drawing/2010/main">
+                <a:effectLst>
+                  <a:outerShdw dist="35921" dir="2700000" algn="ctr" rotWithShape="0">
+                    <a:schemeClr val="bg2"/>
+                  </a:outerShdw>
+                </a:effectLst>
+              </a14:hiddenEffects>
+            </a:ext>
+          </a:extLst>
+        </p:spPr>
+        <p:txBody>
+          <a:bodyPr vert="horz" wrap="none" lIns="91440" tIns="45720" rIns="91440" bIns="45720" numCol="1" anchor="ctr" anchorCtr="0" compatLnSpc="1">
+            <a:prstTxWarp prst="textNoShape">
+              <a:avLst/>
+            </a:prstTxWarp>
+            <a:spAutoFit/>
+          </a:bodyPr>
+          <a:lstStyle/>
+          <a:p>
+            <a:pPr marL="0" marR="0" lvl="0" indent="0" algn="l" defTabSz="914400" rtl="0" eaLnBrk="0" fontAlgn="base" latinLnBrk="0" hangingPunct="0">
+              <a:lnSpc>
+                <a:spcPct val="100000"/>
+              </a:lnSpc>
+              <a:spcBef>
+                <a:spcPct val="0"/>
+              </a:spcBef>
+              <a:spcAft>
+                <a:spcPct val="0"/>
+              </a:spcAft>
+              <a:buClrTx/>
+              <a:buSzTx/>
+              <a:buFontTx/>
+              <a:buChar char="•"/>
+              <a:tabLst/>
+            </a:pPr>
+            <a:r>
+              <a:rPr kumimoji="0" lang="en-US" altLang="en-US" sz="1800" b="0" i="0" u="none" strike="noStrike" cap="none" normalizeH="0" baseline="0" dirty="0" err="1">
+                <a:ln>
+                  <a:noFill/>
+                </a:ln>
+                <a:solidFill>
+                  <a:schemeClr val="tx1"/>
+                </a:solidFill>
+                <a:effectLst/>
+                <a:latin typeface="Arial" panose="020B0604020202020204" pitchFamily="34" charset="0"/>
+              </a:rPr>
+              <a:t>tmax</a:t>
+            </a:r>
+            <a:r>
+              <a:rPr kumimoji="0" lang="en-US" altLang="en-US" sz="1800" b="0" i="0" u="none" strike="noStrike" cap="none" normalizeH="0" baseline="0" dirty="0">
+                <a:ln>
+                  <a:noFill/>
+                </a:ln>
+                <a:solidFill>
+                  <a:schemeClr val="tx1"/>
+                </a:solidFill>
+                <a:effectLst/>
+                <a:latin typeface="Arial" panose="020B0604020202020204" pitchFamily="34" charset="0"/>
+              </a:rPr>
+              <a:t> - maximum temperature </a:t>
+            </a:r>
+          </a:p>
+          <a:p>
+            <a:pPr marL="0" marR="0" lvl="0" indent="0" algn="l" defTabSz="914400" rtl="0" eaLnBrk="0" fontAlgn="base" latinLnBrk="0" hangingPunct="0">
+              <a:lnSpc>
+                <a:spcPct val="100000"/>
+              </a:lnSpc>
+              <a:spcBef>
+                <a:spcPct val="0"/>
+              </a:spcBef>
+              <a:spcAft>
+                <a:spcPct val="0"/>
+              </a:spcAft>
+              <a:buClrTx/>
+              <a:buSzTx/>
+              <a:buFontTx/>
+              <a:buChar char="•"/>
+              <a:tabLst/>
+            </a:pPr>
+            <a:r>
+              <a:rPr kumimoji="0" lang="en-US" altLang="en-US" sz="1800" b="0" i="0" u="none" strike="noStrike" cap="none" normalizeH="0" baseline="0" dirty="0" err="1">
+                <a:ln>
+                  <a:noFill/>
+                </a:ln>
+                <a:solidFill>
+                  <a:schemeClr val="tx1"/>
+                </a:solidFill>
+                <a:effectLst/>
+                <a:latin typeface="Arial" panose="020B0604020202020204" pitchFamily="34" charset="0"/>
+              </a:rPr>
+              <a:t>tmin</a:t>
+            </a:r>
+            <a:r>
+              <a:rPr kumimoji="0" lang="en-US" altLang="en-US" sz="1800" b="0" i="0" u="none" strike="noStrike" cap="none" normalizeH="0" baseline="0" dirty="0">
+                <a:ln>
+                  <a:noFill/>
+                </a:ln>
+                <a:solidFill>
+                  <a:schemeClr val="tx1"/>
+                </a:solidFill>
+                <a:effectLst/>
+                <a:latin typeface="Arial" panose="020B0604020202020204" pitchFamily="34" charset="0"/>
+              </a:rPr>
+              <a:t> - minimum temperature </a:t>
+            </a:r>
+          </a:p>
+          <a:p>
+            <a:pPr marL="0" marR="0" lvl="0" indent="0" algn="l" defTabSz="914400" rtl="0" eaLnBrk="0" fontAlgn="base" latinLnBrk="0" hangingPunct="0">
+              <a:lnSpc>
+                <a:spcPct val="100000"/>
+              </a:lnSpc>
+              <a:spcBef>
+                <a:spcPct val="0"/>
+              </a:spcBef>
+              <a:spcAft>
+                <a:spcPct val="0"/>
+              </a:spcAft>
+              <a:buClrTx/>
+              <a:buSzTx/>
+              <a:buFontTx/>
+              <a:buChar char="•"/>
+              <a:tabLst/>
+            </a:pPr>
+            <a:r>
+              <a:rPr kumimoji="0" lang="en-US" altLang="en-US" sz="1800" b="0" i="0" u="none" strike="noStrike" cap="none" normalizeH="0" baseline="0" dirty="0" err="1">
+                <a:ln>
+                  <a:noFill/>
+                </a:ln>
+                <a:solidFill>
+                  <a:schemeClr val="tx1"/>
+                </a:solidFill>
+                <a:effectLst/>
+                <a:latin typeface="Arial" panose="020B0604020202020204" pitchFamily="34" charset="0"/>
+              </a:rPr>
+              <a:t>srad</a:t>
+            </a:r>
+            <a:r>
+              <a:rPr kumimoji="0" lang="en-US" altLang="en-US" sz="1800" b="0" i="0" u="none" strike="noStrike" cap="none" normalizeH="0" baseline="0" dirty="0">
+                <a:ln>
+                  <a:noFill/>
+                </a:ln>
+                <a:solidFill>
+                  <a:schemeClr val="tx1"/>
+                </a:solidFill>
+                <a:effectLst/>
+                <a:latin typeface="Arial" panose="020B0604020202020204" pitchFamily="34" charset="0"/>
+              </a:rPr>
+              <a:t> - shortwave radiation </a:t>
+            </a:r>
+          </a:p>
+          <a:p>
+            <a:pPr marL="0" marR="0" lvl="0" indent="0" algn="l" defTabSz="914400" rtl="0" eaLnBrk="0" fontAlgn="base" latinLnBrk="0" hangingPunct="0">
+              <a:lnSpc>
+                <a:spcPct val="100000"/>
+              </a:lnSpc>
+              <a:spcBef>
+                <a:spcPct val="0"/>
+              </a:spcBef>
+              <a:spcAft>
+                <a:spcPct val="0"/>
+              </a:spcAft>
+              <a:buClrTx/>
+              <a:buSzTx/>
+              <a:buFontTx/>
+              <a:buChar char="•"/>
+              <a:tabLst/>
+            </a:pPr>
+            <a:r>
+              <a:rPr kumimoji="0" lang="en-US" altLang="en-US" sz="1800" b="0" i="0" u="none" strike="noStrike" cap="none" normalizeH="0" baseline="0" dirty="0" err="1">
+                <a:ln>
+                  <a:noFill/>
+                </a:ln>
+                <a:solidFill>
+                  <a:schemeClr val="tx1"/>
+                </a:solidFill>
+                <a:effectLst/>
+                <a:latin typeface="Arial" panose="020B0604020202020204" pitchFamily="34" charset="0"/>
+              </a:rPr>
+              <a:t>vp</a:t>
+            </a:r>
+            <a:r>
+              <a:rPr kumimoji="0" lang="en-US" altLang="en-US" sz="1800" b="0" i="0" u="none" strike="noStrike" cap="none" normalizeH="0" baseline="0" dirty="0">
+                <a:ln>
+                  <a:noFill/>
+                </a:ln>
+                <a:solidFill>
+                  <a:schemeClr val="tx1"/>
+                </a:solidFill>
+                <a:effectLst/>
+                <a:latin typeface="Arial" panose="020B0604020202020204" pitchFamily="34" charset="0"/>
+              </a:rPr>
+              <a:t> - vapor pressure </a:t>
+            </a:r>
+          </a:p>
+          <a:p>
+            <a:pPr marL="0" marR="0" lvl="0" indent="0" algn="l" defTabSz="914400" rtl="0" eaLnBrk="0" fontAlgn="base" latinLnBrk="0" hangingPunct="0">
+              <a:lnSpc>
+                <a:spcPct val="100000"/>
+              </a:lnSpc>
+              <a:spcBef>
+                <a:spcPct val="0"/>
+              </a:spcBef>
+              <a:spcAft>
+                <a:spcPct val="0"/>
+              </a:spcAft>
+              <a:buClrTx/>
+              <a:buSzTx/>
+              <a:buFontTx/>
+              <a:buChar char="•"/>
+              <a:tabLst/>
+            </a:pPr>
+            <a:r>
+              <a:rPr kumimoji="0" lang="en-US" altLang="en-US" sz="1800" b="0" i="0" u="none" strike="noStrike" cap="none" normalizeH="0" baseline="0" dirty="0" err="1">
+                <a:ln>
+                  <a:noFill/>
+                </a:ln>
+                <a:solidFill>
+                  <a:schemeClr val="tx1"/>
+                </a:solidFill>
+                <a:effectLst/>
+                <a:latin typeface="Arial" panose="020B0604020202020204" pitchFamily="34" charset="0"/>
+              </a:rPr>
+              <a:t>swe</a:t>
+            </a:r>
+            <a:r>
+              <a:rPr kumimoji="0" lang="en-US" altLang="en-US" sz="1800" b="0" i="0" u="none" strike="noStrike" cap="none" normalizeH="0" baseline="0" dirty="0">
+                <a:ln>
+                  <a:noFill/>
+                </a:ln>
+                <a:solidFill>
+                  <a:schemeClr val="tx1"/>
+                </a:solidFill>
+                <a:effectLst/>
+                <a:latin typeface="Arial" panose="020B0604020202020204" pitchFamily="34" charset="0"/>
+              </a:rPr>
+              <a:t> - snow-water equivalent </a:t>
+            </a:r>
+          </a:p>
+          <a:p>
+            <a:pPr marL="0" marR="0" lvl="0" indent="0" algn="l" defTabSz="914400" rtl="0" eaLnBrk="0" fontAlgn="base" latinLnBrk="0" hangingPunct="0">
+              <a:lnSpc>
+                <a:spcPct val="100000"/>
+              </a:lnSpc>
+              <a:spcBef>
+                <a:spcPct val="0"/>
+              </a:spcBef>
+              <a:spcAft>
+                <a:spcPct val="0"/>
+              </a:spcAft>
+              <a:buClrTx/>
+              <a:buSzTx/>
+              <a:buFontTx/>
+              <a:buChar char="•"/>
+              <a:tabLst/>
+            </a:pPr>
+            <a:r>
+              <a:rPr kumimoji="0" lang="en-US" altLang="en-US" sz="1800" b="0" i="0" u="none" strike="noStrike" cap="none" normalizeH="0" baseline="0" dirty="0" err="1">
+                <a:ln>
+                  <a:noFill/>
+                </a:ln>
+                <a:solidFill>
+                  <a:schemeClr val="tx1"/>
+                </a:solidFill>
+                <a:effectLst/>
+                <a:latin typeface="Arial" panose="020B0604020202020204" pitchFamily="34" charset="0"/>
+              </a:rPr>
+              <a:t>prcp</a:t>
+            </a:r>
+            <a:r>
+              <a:rPr kumimoji="0" lang="en-US" altLang="en-US" sz="1800" b="0" i="0" u="none" strike="noStrike" cap="none" normalizeH="0" baseline="0" dirty="0">
+                <a:ln>
+                  <a:noFill/>
+                </a:ln>
+                <a:solidFill>
+                  <a:schemeClr val="tx1"/>
+                </a:solidFill>
+                <a:effectLst/>
+                <a:latin typeface="Arial" panose="020B0604020202020204" pitchFamily="34" charset="0"/>
+              </a:rPr>
+              <a:t> - precipitation </a:t>
+            </a:r>
+          </a:p>
+          <a:p>
+            <a:pPr marL="0" marR="0" lvl="0" indent="0" algn="l" defTabSz="914400" rtl="0" eaLnBrk="0" fontAlgn="base" latinLnBrk="0" hangingPunct="0">
+              <a:lnSpc>
+                <a:spcPct val="100000"/>
+              </a:lnSpc>
+              <a:spcBef>
+                <a:spcPct val="0"/>
+              </a:spcBef>
+              <a:spcAft>
+                <a:spcPct val="0"/>
+              </a:spcAft>
+              <a:buClrTx/>
+              <a:buSzTx/>
+              <a:buFontTx/>
+              <a:buChar char="•"/>
+              <a:tabLst/>
+            </a:pPr>
+            <a:r>
+              <a:rPr kumimoji="0" lang="en-US" altLang="en-US" sz="1800" b="0" i="0" u="none" strike="noStrike" cap="none" normalizeH="0" baseline="0" dirty="0" err="1">
+                <a:ln>
+                  <a:noFill/>
+                </a:ln>
+                <a:solidFill>
+                  <a:schemeClr val="tx1"/>
+                </a:solidFill>
+                <a:effectLst/>
+                <a:latin typeface="Arial" panose="020B0604020202020204" pitchFamily="34" charset="0"/>
+              </a:rPr>
+              <a:t>dayl</a:t>
+            </a:r>
+            <a:r>
+              <a:rPr kumimoji="0" lang="en-US" altLang="en-US" sz="1800" b="0" i="0" u="none" strike="noStrike" cap="none" normalizeH="0" baseline="0" dirty="0">
+                <a:ln>
+                  <a:noFill/>
+                </a:ln>
+                <a:solidFill>
+                  <a:schemeClr val="tx1"/>
+                </a:solidFill>
+                <a:effectLst/>
+                <a:latin typeface="Arial" panose="020B0604020202020204" pitchFamily="34" charset="0"/>
+              </a:rPr>
+              <a:t> - daylength </a:t>
+            </a:r>
+          </a:p>
+        </p:txBody>
+      </p:sp>
     </p:spTree>
     <p:extLst>
       <p:ext uri="{BB962C8B-B14F-4D97-AF65-F5344CB8AC3E}">
@@ -6943,7 +7587,7 @@
 </p:sld>
 </file>
 
-<file path=ppt/slides/slide13.xml><?xml version="1.0" encoding="utf-8"?>
+<file path=ppt/slides/slide14.xml><?xml version="1.0" encoding="utf-8"?>
 <p:sld xmlns:a="http://schemas.openxmlformats.org/drawingml/2006/main" xmlns:r="http://schemas.openxmlformats.org/officeDocument/2006/relationships" xmlns:p="http://schemas.openxmlformats.org/presentationml/2006/main">
   <p:cSld>
     <p:spTree>
@@ -10337,23 +10981,7 @@
                   <a:schemeClr val="bg1"/>
                 </a:solidFill>
               </a:rPr>
-              <a:t>Use `</a:t>
-            </a:r>
-            <a:r>
-              <a:rPr lang="en-US" sz="2000" dirty="0" err="1">
-                <a:solidFill>
-                  <a:schemeClr val="bg1"/>
-                </a:solidFill>
-              </a:rPr>
-              <a:t>read_csv</a:t>
-            </a:r>
-            <a:r>
-              <a:rPr lang="en-US" sz="2000" dirty="0">
-                <a:solidFill>
-                  <a:schemeClr val="bg1"/>
-                </a:solidFill>
-              </a:rPr>
-              <a:t>` to load this data into R. </a:t>
+              <a:t>Use `read.csv` to load this data into R. </a:t>
             </a:r>
           </a:p>
           <a:p>
@@ -10439,7 +11067,14 @@
           <a:p>
             <a:r>
               <a:rPr lang="en-US" dirty="0"/>
-              <a:t>What other file types do you see in our data?</a:t>
+              <a:t>Besides csv, </a:t>
+            </a:r>
+            <a:br>
+              <a:rPr lang="en-US" dirty="0"/>
+            </a:br>
+            <a:r>
+              <a:rPr lang="en-US" dirty="0"/>
+              <a:t>how many file types can you name?</a:t>
             </a:r>
           </a:p>
         </p:txBody>
@@ -10571,6 +11206,77 @@
       </p:grpSpPr>
       <p:sp>
         <p:nvSpPr>
+          <p:cNvPr id="2" name="Title 1">
+            <a:extLst>
+              <a:ext uri="{FF2B5EF4-FFF2-40B4-BE49-F238E27FC236}">
+                <a16:creationId xmlns:a16="http://schemas.microsoft.com/office/drawing/2014/main" id="{45CABAF7-6D45-4663-AD5F-41C4461AD126}"/>
+              </a:ext>
+            </a:extLst>
+          </p:cNvPr>
+          <p:cNvSpPr>
+            <a:spLocks noGrp="1"/>
+          </p:cNvSpPr>
+          <p:nvPr>
+            <p:ph type="title"/>
+          </p:nvPr>
+        </p:nvSpPr>
+        <p:spPr/>
+        <p:txBody>
+          <a:bodyPr/>
+          <a:lstStyle/>
+          <a:p>
+            <a:r>
+              <a:rPr lang="en-US" dirty="0"/>
+              <a:t>How many file types can you name?</a:t>
+            </a:r>
+          </a:p>
+        </p:txBody>
+      </p:sp>
+      <p:sp>
+        <p:nvSpPr>
+          <p:cNvPr id="3" name="Content Placeholder 2">
+            <a:extLst>
+              <a:ext uri="{FF2B5EF4-FFF2-40B4-BE49-F238E27FC236}">
+                <a16:creationId xmlns:a16="http://schemas.microsoft.com/office/drawing/2014/main" id="{097CFF49-6B41-4AE0-A375-7006BBA9A130}"/>
+              </a:ext>
+            </a:extLst>
+          </p:cNvPr>
+          <p:cNvSpPr>
+            <a:spLocks noGrp="1"/>
+          </p:cNvSpPr>
+          <p:nvPr>
+            <p:ph idx="1"/>
+          </p:nvPr>
+        </p:nvSpPr>
+        <p:spPr/>
+        <p:txBody>
+          <a:bodyPr/>
+          <a:lstStyle/>
+          <a:p>
+            <a:r>
+              <a:rPr lang="en-US" dirty="0"/>
+              <a:t>Full name of the file type</a:t>
+            </a:r>
+          </a:p>
+          <a:p>
+            <a:r>
+              <a:rPr lang="en-US" dirty="0"/>
+              <a:t>Its extension (e.g., “.csv”)</a:t>
+            </a:r>
+          </a:p>
+          <a:p>
+            <a:r>
+              <a:rPr lang="en-US" dirty="0"/>
+              <a:t>What it’s used for</a:t>
+            </a:r>
+          </a:p>
+          <a:p>
+            <a:endParaRPr lang="en-US" dirty="0"/>
+          </a:p>
+        </p:txBody>
+      </p:sp>
+      <p:sp>
+        <p:nvSpPr>
           <p:cNvPr id="4" name="Slide Number Placeholder 3">
             <a:extLst>
               <a:ext uri="{FF2B5EF4-FFF2-40B4-BE49-F238E27FC236}">
@@ -10604,6 +11310,81 @@
                 <a:buSzPct val="25000"/>
               </a:pPr>
               <a:t>7</a:t>
+            </a:fld>
+            <a:endParaRPr lang="en-US" sz="1200" dirty="0">
+              <a:latin typeface="Calibri"/>
+              <a:ea typeface="Calibri"/>
+              <a:cs typeface="Calibri"/>
+              <a:sym typeface="Calibri"/>
+            </a:endParaRPr>
+          </a:p>
+        </p:txBody>
+      </p:sp>
+    </p:spTree>
+    <p:extLst>
+      <p:ext uri="{BB962C8B-B14F-4D97-AF65-F5344CB8AC3E}">
+        <p14:creationId xmlns:p14="http://schemas.microsoft.com/office/powerpoint/2010/main" val="3801913343"/>
+      </p:ext>
+    </p:extLst>
+  </p:cSld>
+  <p:clrMapOvr>
+    <a:masterClrMapping/>
+  </p:clrMapOvr>
+</p:sld>
+</file>
+
+<file path=ppt/slides/slide8.xml><?xml version="1.0" encoding="utf-8"?>
+<p:sld xmlns:a="http://schemas.openxmlformats.org/drawingml/2006/main" xmlns:r="http://schemas.openxmlformats.org/officeDocument/2006/relationships" xmlns:p="http://schemas.openxmlformats.org/presentationml/2006/main">
+  <p:cSld>
+    <p:spTree>
+      <p:nvGrpSpPr>
+        <p:cNvPr id="1" name=""/>
+        <p:cNvGrpSpPr/>
+        <p:nvPr/>
+      </p:nvGrpSpPr>
+      <p:grpSpPr>
+        <a:xfrm>
+          <a:off x="0" y="0"/>
+          <a:ext cx="0" cy="0"/>
+          <a:chOff x="0" y="0"/>
+          <a:chExt cx="0" cy="0"/>
+        </a:xfrm>
+      </p:grpSpPr>
+      <p:sp>
+        <p:nvSpPr>
+          <p:cNvPr id="4" name="Slide Number Placeholder 3">
+            <a:extLst>
+              <a:ext uri="{FF2B5EF4-FFF2-40B4-BE49-F238E27FC236}">
+                <a16:creationId xmlns:a16="http://schemas.microsoft.com/office/drawing/2014/main" id="{87A95856-95F6-4516-A21E-BF7FF5FE8293}"/>
+              </a:ext>
+            </a:extLst>
+          </p:cNvPr>
+          <p:cNvSpPr>
+            <a:spLocks noGrp="1"/>
+          </p:cNvSpPr>
+          <p:nvPr>
+            <p:ph type="sldNum" sz="quarter" idx="12"/>
+          </p:nvPr>
+        </p:nvSpPr>
+        <p:spPr/>
+        <p:txBody>
+          <a:bodyPr/>
+          <a:lstStyle/>
+          <a:p>
+            <a:pPr>
+              <a:buSzPct val="25000"/>
+            </a:pPr>
+            <a:fld id="{00000000-1234-1234-1234-123412341234}" type="slidenum">
+              <a:rPr lang="en-US" sz="1200" smtClean="0">
+                <a:latin typeface="Calibri"/>
+                <a:ea typeface="Calibri"/>
+                <a:cs typeface="Calibri"/>
+                <a:sym typeface="Calibri"/>
+              </a:rPr>
+              <a:pPr>
+                <a:buSzPct val="25000"/>
+              </a:pPr>
+              <a:t>8</a:t>
             </a:fld>
             <a:endParaRPr lang="en-US" sz="1200" dirty="0">
               <a:latin typeface="Calibri"/>
@@ -10708,7 +11489,7 @@
 </p:sld>
 </file>
 
-<file path=ppt/slides/slide8.xml><?xml version="1.0" encoding="utf-8"?>
+<file path=ppt/slides/slide9.xml><?xml version="1.0" encoding="utf-8"?>
 <p:sld xmlns:a="http://schemas.openxmlformats.org/drawingml/2006/main" xmlns:r="http://schemas.openxmlformats.org/officeDocument/2006/relationships" xmlns:p="http://schemas.openxmlformats.org/presentationml/2006/main">
   <p:cSld>
     <p:spTree>
@@ -10868,7 +11649,7 @@
               <a:pPr>
                 <a:buSzPct val="25000"/>
               </a:pPr>
-              <a:t>8</a:t>
+              <a:t>9</a:t>
             </a:fld>
             <a:endParaRPr lang="en-US" sz="1200" dirty="0">
               <a:latin typeface="Calibri"/>
@@ -10990,275 +11771,6 @@
   <p:clrMapOvr>
     <a:masterClrMapping/>
   </p:clrMapOvr>
-</p:sld>
-</file>
-
-<file path=ppt/slides/slide9.xml><?xml version="1.0" encoding="utf-8"?>
-<p:sld xmlns:a="http://schemas.openxmlformats.org/drawingml/2006/main" xmlns:r="http://schemas.openxmlformats.org/officeDocument/2006/relationships" xmlns:p="http://schemas.openxmlformats.org/presentationml/2006/main">
-  <p:cSld>
-    <p:spTree>
-      <p:nvGrpSpPr>
-        <p:cNvPr id="1" name="">
-          <a:extLst>
-            <a:ext uri="{FF2B5EF4-FFF2-40B4-BE49-F238E27FC236}">
-              <a16:creationId xmlns:a16="http://schemas.microsoft.com/office/drawing/2014/main" id="{567F2124-7DBC-AD03-50A6-D3AC0171D610}"/>
-            </a:ext>
-          </a:extLst>
-        </p:cNvPr>
-        <p:cNvGrpSpPr/>
-        <p:nvPr/>
-      </p:nvGrpSpPr>
-      <p:grpSpPr>
-        <a:xfrm>
-          <a:off x="0" y="0"/>
-          <a:ext cx="0" cy="0"/>
-          <a:chOff x="0" y="0"/>
-          <a:chExt cx="0" cy="0"/>
-        </a:xfrm>
-      </p:grpSpPr>
-      <p:sp>
-        <p:nvSpPr>
-          <p:cNvPr id="2" name="Title 1">
-            <a:extLst>
-              <a:ext uri="{FF2B5EF4-FFF2-40B4-BE49-F238E27FC236}">
-                <a16:creationId xmlns:a16="http://schemas.microsoft.com/office/drawing/2014/main" id="{45094D35-71A6-19A5-3C88-276C261693B9}"/>
-              </a:ext>
-            </a:extLst>
-          </p:cNvPr>
-          <p:cNvSpPr>
-            <a:spLocks noGrp="1"/>
-          </p:cNvSpPr>
-          <p:nvPr>
-            <p:ph type="title"/>
-          </p:nvPr>
-        </p:nvSpPr>
-        <p:spPr/>
-        <p:txBody>
-          <a:bodyPr/>
-          <a:lstStyle/>
-          <a:p>
-            <a:r>
-              <a:rPr lang="en-US" dirty="0"/>
-              <a:t>What is an “API”?</a:t>
-            </a:r>
-          </a:p>
-        </p:txBody>
-      </p:sp>
-      <p:sp>
-        <p:nvSpPr>
-          <p:cNvPr id="7" name="TextBox 6">
-            <a:extLst>
-              <a:ext uri="{FF2B5EF4-FFF2-40B4-BE49-F238E27FC236}">
-                <a16:creationId xmlns:a16="http://schemas.microsoft.com/office/drawing/2014/main" id="{2A4B8C7C-A8CD-E881-068E-D5835A4BE4E8}"/>
-              </a:ext>
-            </a:extLst>
-          </p:cNvPr>
-          <p:cNvSpPr txBox="1"/>
-          <p:nvPr/>
-        </p:nvSpPr>
-        <p:spPr>
-          <a:xfrm>
-            <a:off x="6206864" y="1265595"/>
-            <a:ext cx="4732871" cy="369332"/>
-          </a:xfrm>
-          <a:prstGeom prst="rect">
-            <a:avLst/>
-          </a:prstGeom>
-          <a:noFill/>
-        </p:spPr>
-        <p:txBody>
-          <a:bodyPr wrap="square" rtlCol="0">
-            <a:spAutoFit/>
-          </a:bodyPr>
-          <a:lstStyle/>
-          <a:p>
-            <a:r>
-              <a:rPr lang="en-US" b="1" dirty="0">
-                <a:solidFill>
-                  <a:schemeClr val="bg2">
-                    <a:lumMod val="50000"/>
-                  </a:schemeClr>
-                </a:solidFill>
-              </a:rPr>
-              <a:t>Application programming interface</a:t>
-            </a:r>
-          </a:p>
-        </p:txBody>
-      </p:sp>
-      <p:pic>
-        <p:nvPicPr>
-          <p:cNvPr id="1026" name="Picture 2" descr="What-is-an-API">
-            <a:extLst>
-              <a:ext uri="{FF2B5EF4-FFF2-40B4-BE49-F238E27FC236}">
-                <a16:creationId xmlns:a16="http://schemas.microsoft.com/office/drawing/2014/main" id="{85ED8693-1837-4A89-A24C-ECF7028CABA5}"/>
-              </a:ext>
-            </a:extLst>
-          </p:cNvPr>
-          <p:cNvPicPr>
-            <a:picLocks noChangeAspect="1" noChangeArrowheads="1"/>
-          </p:cNvPicPr>
-          <p:nvPr/>
-        </p:nvPicPr>
-        <p:blipFill>
-          <a:blip r:embed="rId3">
-            <a:extLst>
-              <a:ext uri="{28A0092B-C50C-407E-A947-70E740481C1C}">
-                <a14:useLocalDpi xmlns:a14="http://schemas.microsoft.com/office/drawing/2010/main" val="0"/>
-              </a:ext>
-            </a:extLst>
-          </a:blip>
-          <a:srcRect/>
-          <a:stretch>
-            <a:fillRect/>
-          </a:stretch>
-        </p:blipFill>
-        <p:spPr bwMode="auto">
-          <a:xfrm>
-            <a:off x="1181100" y="1901825"/>
-            <a:ext cx="9525000" cy="4476750"/>
-          </a:xfrm>
-          <a:prstGeom prst="rect">
-            <a:avLst/>
-          </a:prstGeom>
-          <a:noFill/>
-          <a:extLst>
-            <a:ext uri="{909E8E84-426E-40DD-AFC4-6F175D3DCCD1}">
-              <a14:hiddenFill xmlns:a14="http://schemas.microsoft.com/office/drawing/2010/main">
-                <a:solidFill>
-                  <a:srgbClr val="FFFFFF"/>
-                </a:solidFill>
-              </a14:hiddenFill>
-            </a:ext>
-          </a:extLst>
-        </p:spPr>
-      </p:pic>
-      <p:sp>
-        <p:nvSpPr>
-          <p:cNvPr id="8" name="TextBox 7">
-            <a:extLst>
-              <a:ext uri="{FF2B5EF4-FFF2-40B4-BE49-F238E27FC236}">
-                <a16:creationId xmlns:a16="http://schemas.microsoft.com/office/drawing/2014/main" id="{82549FDB-D93F-409D-A225-3667F7B4D971}"/>
-              </a:ext>
-            </a:extLst>
-          </p:cNvPr>
-          <p:cNvSpPr txBox="1"/>
-          <p:nvPr/>
-        </p:nvSpPr>
-        <p:spPr>
-          <a:xfrm>
-            <a:off x="416560" y="6417508"/>
-            <a:ext cx="7193280" cy="307777"/>
-          </a:xfrm>
-          <a:prstGeom prst="rect">
-            <a:avLst/>
-          </a:prstGeom>
-          <a:noFill/>
-        </p:spPr>
-        <p:txBody>
-          <a:bodyPr wrap="square">
-            <a:spAutoFit/>
-          </a:bodyPr>
-          <a:lstStyle/>
-          <a:p>
-            <a:r>
-              <a:rPr lang="en-US" sz="1400" dirty="0">
-                <a:solidFill>
-                  <a:schemeClr val="bg1"/>
-                </a:solidFill>
-              </a:rPr>
-              <a:t>https://www.geeksforgeeks.org/web-tech/terminologies-of-web-development/</a:t>
-            </a:r>
-          </a:p>
-        </p:txBody>
-      </p:sp>
-    </p:spTree>
-    <p:extLst>
-      <p:ext uri="{BB962C8B-B14F-4D97-AF65-F5344CB8AC3E}">
-        <p14:creationId xmlns:p14="http://schemas.microsoft.com/office/powerpoint/2010/main" val="1135782706"/>
-      </p:ext>
-    </p:extLst>
-  </p:cSld>
-  <p:clrMapOvr>
-    <a:masterClrMapping/>
-  </p:clrMapOvr>
-  <p:timing>
-    <p:tnLst>
-      <p:par>
-        <p:cTn id="1" dur="indefinite" restart="never" nodeType="tmRoot">
-          <p:childTnLst>
-            <p:seq concurrent="1" nextAc="seek">
-              <p:cTn id="2" dur="indefinite" nodeType="mainSeq">
-                <p:childTnLst>
-                  <p:par>
-                    <p:cTn id="3" fill="hold">
-                      <p:stCondLst>
-                        <p:cond delay="indefinite"/>
-                      </p:stCondLst>
-                      <p:childTnLst>
-                        <p:par>
-                          <p:cTn id="4" fill="hold">
-                            <p:stCondLst>
-                              <p:cond delay="0"/>
-                            </p:stCondLst>
-                            <p:childTnLst>
-                              <p:par>
-                                <p:cTn id="5" presetID="1" presetClass="entr" presetSubtype="0" fill="hold" grpId="0" nodeType="clickEffect">
-                                  <p:stCondLst>
-                                    <p:cond delay="0"/>
-                                  </p:stCondLst>
-                                  <p:childTnLst>
-                                    <p:set>
-                                      <p:cBhvr>
-                                        <p:cTn id="6" dur="1" fill="hold">
-                                          <p:stCondLst>
-                                            <p:cond delay="0"/>
-                                          </p:stCondLst>
-                                        </p:cTn>
-                                        <p:tgtEl>
-                                          <p:spTgt spid="7"/>
-                                        </p:tgtEl>
-                                        <p:attrNameLst>
-                                          <p:attrName>style.visibility</p:attrName>
-                                        </p:attrNameLst>
-                                      </p:cBhvr>
-                                      <p:to>
-                                        <p:strVal val="visible"/>
-                                      </p:to>
-                                    </p:set>
-                                  </p:childTnLst>
-                                </p:cTn>
-                              </p:par>
-                            </p:childTnLst>
-                          </p:cTn>
-                        </p:par>
-                      </p:childTnLst>
-                    </p:cTn>
-                  </p:par>
-                </p:childTnLst>
-              </p:cTn>
-              <p:prevCondLst>
-                <p:cond evt="onPrev" delay="0">
-                  <p:tgtEl>
-                    <p:sldTgt/>
-                  </p:tgtEl>
-                </p:cond>
-              </p:prevCondLst>
-              <p:nextCondLst>
-                <p:cond evt="onNext" delay="0">
-                  <p:tgtEl>
-                    <p:sldTgt/>
-                  </p:tgtEl>
-                </p:cond>
-              </p:nextCondLst>
-            </p:seq>
-          </p:childTnLst>
-        </p:cTn>
-      </p:par>
-    </p:tnLst>
-    <p:bldLst>
-      <p:bldP spid="7" grpId="0"/>
-    </p:bldLst>
-  </p:timing>
 </p:sld>
 </file>
 
